--- a/docs/presentaties/ClubComm-teamleider.pptx
+++ b/docs/presentaties/ClubComm-teamleider.pptx
@@ -6901,7 +6901,7 @@
                 <a:ea typeface="Calibri" pitchFamily="34" charset="-122"/>
                 <a:cs typeface="Calibri" pitchFamily="34" charset="-120"/>
               </a:rPr>
-              <a:t>Open de mail</a:t>
+              <a:t>Typ de code over</a:t>
             </a:r>
             <a:endParaRPr lang="en-US" sz="1700" dirty="0"/>
           </a:p>
@@ -6918,7 +6918,7 @@
                 <a:ea typeface="Calibri" pitchFamily="34" charset="-122"/>
                 <a:cs typeface="Calibri" pitchFamily="34" charset="-120"/>
               </a:rPr>
-              <a:t>Tik op de knop in de mail, of typ de code van 6 cijfers over.</a:t>
+              <a:t>Je krijgt een mail met een code van 6 cijfers. Typ die over in de app.</a:t>
             </a:r>
             <a:endParaRPr lang="en-US" sz="1700" dirty="0"/>
           </a:p>
@@ -7118,7 +7118,7 @@
                 <a:ea typeface="Calibri" pitchFamily="34" charset="-122"/>
                 <a:cs typeface="Calibri" pitchFamily="34" charset="-120"/>
               </a:rPr>
-              <a:t>Zet ClubComm op je beginscherm. iPhone: Delen → Zet op beginscherm. Android: tik op ClubComm installeren.</a:t>
+              <a:t>Zet ClubComm op je beginscherm (iPhone: Delen → Zet op beginscherm). Log daarna in via het icoon en typ de code over: de knop in de mail opent Safari.</a:t>
             </a:r>
             <a:endParaRPr lang="en-US" sz="1300" dirty="0"/>
           </a:p>

--- a/docs/presentaties/ClubComm-teamleider.pptx
+++ b/docs/presentaties/ClubComm-teamleider.pptx
@@ -2229,7 +2229,7 @@
             </a:avLst>
           </a:prstGeom>
           <a:solidFill>
-            <a:srgbClr val="0B2545"/>
+            <a:srgbClr val="2A4A7A"/>
           </a:solidFill>
           <a:ln/>
           <a:effectLst>

--- a/docs/presentaties/ClubComm-teamleider.pptx
+++ b/docs/presentaties/ClubComm-teamleider.pptx
@@ -7118,7 +7118,7 @@
                 <a:ea typeface="Calibri" pitchFamily="34" charset="-122"/>
                 <a:cs typeface="Calibri" pitchFamily="34" charset="-120"/>
               </a:rPr>
-              <a:t>Zet ClubComm op je beginscherm (iPhone: Delen → Zet op beginscherm). Log daarna in via het icoon en typ de code over: de knop in de mail opent Safari.</a:t>
+              <a:t>Zet ClubComm op je beginscherm (iPhone: Delen → Zet op beginscherm). Log daarna in via het icoon en typ de code van 6 cijfers uit de mail over.</a:t>
             </a:r>
             <a:endParaRPr lang="en-US" sz="1300" dirty="0"/>
           </a:p>

--- a/docs/presentaties/ClubComm-teamleider.pptx
+++ b/docs/presentaties/ClubComm-teamleider.pptx
@@ -7118,7 +7118,7 @@
                 <a:ea typeface="Calibri" pitchFamily="34" charset="-122"/>
                 <a:cs typeface="Calibri" pitchFamily="34" charset="-120"/>
               </a:rPr>
-              <a:t>Zet ClubComm op je beginscherm (iPhone: Delen → Zet op beginscherm). Log daarna in via het icoon en typ de code van 6 cijfers uit de mail over.</a:t>
+              <a:t>Zet ClubComm op je beginscherm (iPhone: Delen, of ••• → Deel → Zet op beginscherm). Log daarna in via het icoon en typ de code van 6 cijfers uit de mail over.</a:t>
             </a:r>
             <a:endParaRPr lang="en-US" sz="1300" dirty="0"/>
           </a:p>
